--- a/classes/parte-7-red-team-y-operaciones-ofensivas/162-mitre-att-ck-como-lenguaje-ofensivo/clase-162-presentacion.pptx
+++ b/classes/parte-7-red-team-y-operaciones-ofensivas/162-mitre-att-ck-como-lenguaje-ofensivo/clase-162-presentacion.pptx
@@ -17,6 +17,9 @@
     <p:sldId id="265" r:id="rId16"/>
     <p:sldId id="266" r:id="rId17"/>
     <p:sldId id="267" r:id="rId18"/>
+    <p:sldId id="268" r:id="rId19"/>
+    <p:sldId id="269" r:id="rId20"/>
+    <p:sldId id="270" r:id="rId21"/>
   </p:sldIdLst>
   <p:sldSz cx="9144000" cy="6858000" type="screen4x3"/>
   <p:notesSz cx="6858000" cy="9144000"/>
@@ -3198,7 +3201,7 @@
                   <a:srgbClr val="0B3D2E"/>
                 </a:solidFill>
               </a:rPr>
-              <a:t>⚠️ Errores comunes</a:t>
+              <a:t>✍️ Ejercicios</a:t>
             </a:r>
           </a:p>
         </p:txBody>
@@ -3236,67 +3239,82 @@
                   <a:srgbClr val="22282E"/>
                 </a:solidFill>
               </a:rPr>
-              <a:t>•  Confundir táctica con técnica — La táctica es el "por qué", la técnica el "cómo"; revisa la jerarquía</a:t>
-            </a:r>
-          </a:p>
-          <a:p>
-            <a:pPr>
-              <a:spcAft>
-                <a:spcPts val="600"/>
-              </a:spcAft>
-            </a:pPr>
-            <a:r>
-              <a:rPr sz="1500">
-                <a:solidFill>
-                  <a:srgbClr val="22282E"/>
-                </a:solidFill>
-              </a:rPr>
-              <a:t>•  ID inválido en Navigator — Usaste un ID deprecado; verifica en attack.mitre.org la versión actual</a:t>
-            </a:r>
-          </a:p>
-          <a:p>
-            <a:pPr>
-              <a:spcAft>
-                <a:spcPts val="600"/>
-              </a:spcAft>
-            </a:pPr>
-            <a:r>
-              <a:rPr sz="1500">
-                <a:solidFill>
-                  <a:srgbClr val="22282E"/>
-                </a:solidFill>
-              </a:rPr>
-              <a:t>•  Layer no importa — JSON mal formado o versión de Navigator distinta; ajusta el campo versions</a:t>
-            </a:r>
-          </a:p>
-          <a:p>
-            <a:pPr>
-              <a:spcAft>
-                <a:spcPts val="600"/>
-              </a:spcAft>
-            </a:pPr>
-            <a:r>
-              <a:rPr sz="1500">
-                <a:solidFill>
-                  <a:srgbClr val="22282E"/>
-                </a:solidFill>
-              </a:rPr>
-              <a:t>•  Técnica sin detección clara — No revisaste Data Sources; abre la técnica y lee la sección Detection</a:t>
-            </a:r>
-          </a:p>
-          <a:p>
-            <a:pPr>
-              <a:spcAft>
-                <a:spcPts val="600"/>
-              </a:spcAft>
-            </a:pPr>
-            <a:r>
-              <a:rPr sz="1500">
-                <a:solidFill>
-                  <a:srgbClr val="22282E"/>
-                </a:solidFill>
-              </a:rPr>
-              <a:t>•  Mezclar matrices — Aplicaste una técnica ICS a Enterprise; confirma la matriz correcta</a:t>
+              <a:t>•  Da el ID ATT&amp;CK de: Kerberoasting, Pass-the-Hash, LSASS dumping y phishing con adjunto.</a:t>
+            </a:r>
+          </a:p>
+          <a:p>
+            <a:pPr>
+              <a:spcAft>
+                <a:spcPts val="600"/>
+              </a:spcAft>
+            </a:pPr>
+            <a:r>
+              <a:rPr sz="1500">
+                <a:solidFill>
+                  <a:srgbClr val="22282E"/>
+                </a:solidFill>
+              </a:rPr>
+              <a:t>•  Explica la diferencia entre técnica y procedimiento con un ejemplo de PowerShell.</a:t>
+            </a:r>
+          </a:p>
+          <a:p>
+            <a:pPr>
+              <a:spcAft>
+                <a:spcPts val="600"/>
+              </a:spcAft>
+            </a:pPr>
+            <a:r>
+              <a:rPr sz="1500">
+                <a:solidFill>
+                  <a:srgbClr val="22282E"/>
+                </a:solidFill>
+              </a:rPr>
+              <a:t>•  Crea un layer de Navigator con 10 técnicas y exporta el JSON.</a:t>
+            </a:r>
+          </a:p>
+          <a:p>
+            <a:pPr>
+              <a:spcAft>
+                <a:spcPts val="600"/>
+              </a:spcAft>
+            </a:pPr>
+            <a:r>
+              <a:rPr sz="1500">
+                <a:solidFill>
+                  <a:srgbClr val="22282E"/>
+                </a:solidFill>
+              </a:rPr>
+              <a:t>•  Para 5 técnicas, indica su Data Source principal de detección.</a:t>
+            </a:r>
+          </a:p>
+          <a:p>
+            <a:pPr>
+              <a:spcAft>
+                <a:spcPts val="600"/>
+              </a:spcAft>
+            </a:pPr>
+            <a:r>
+              <a:rPr sz="1500">
+                <a:solidFill>
+                  <a:srgbClr val="22282E"/>
+                </a:solidFill>
+              </a:rPr>
+              <a:t>•  Compara la matriz Enterprise con la de ICS: nombra dos tácticas exclusivas de ICS.</a:t>
+            </a:r>
+          </a:p>
+          <a:p>
+            <a:pPr>
+              <a:spcAft>
+                <a:spcPts val="600"/>
+              </a:spcAft>
+            </a:pPr>
+            <a:r>
+              <a:rPr sz="1500">
+                <a:solidFill>
+                  <a:srgbClr val="22282E"/>
+                </a:solidFill>
+              </a:rPr>
+              <a:t>•  Usa la API para contar cuántas subtécnicas tiene T1059.</a:t>
             </a:r>
           </a:p>
         </p:txBody>
@@ -3347,7 +3365,7 @@
                   <a:srgbClr val="0B3D2E"/>
                 </a:solidFill>
               </a:rPr>
-              <a:t>❓ Preguntas frecuentes</a:t>
+              <a:t>📝 Reto verificable</a:t>
             </a:r>
           </a:p>
         </p:txBody>
@@ -3385,82 +3403,22 @@
                   <a:srgbClr val="22282E"/>
                 </a:solidFill>
               </a:rPr>
-              <a:t>•  ❓ ¿ATT&amp;CK es solo para defensores?</a:t>
-            </a:r>
-          </a:p>
-          <a:p>
-            <a:pPr>
-              <a:spcAft>
-                <a:spcPts val="600"/>
-              </a:spcAft>
-            </a:pPr>
-            <a:r>
-              <a:rPr sz="1500">
-                <a:solidFill>
-                  <a:srgbClr val="22282E"/>
-                </a:solidFill>
-              </a:rPr>
-              <a:t>•  No. Para el Red Team es el mapa de planificación y el idioma del informe: mapear tus TTPs permite que la defensa mida su cobertura.</a:t>
-            </a:r>
-          </a:p>
-          <a:p>
-            <a:pPr>
-              <a:spcAft>
-                <a:spcPts val="600"/>
-              </a:spcAft>
-            </a:pPr>
-            <a:r>
-              <a:rPr sz="1500">
-                <a:solidFill>
-                  <a:srgbClr val="22282E"/>
-                </a:solidFill>
-              </a:rPr>
-              <a:t>•  ❓ ¿Cada técnica tiene una única detección?</a:t>
-            </a:r>
-          </a:p>
-          <a:p>
-            <a:pPr>
-              <a:spcAft>
-                <a:spcPts val="600"/>
-              </a:spcAft>
-            </a:pPr>
-            <a:r>
-              <a:rPr sz="1500">
-                <a:solidFill>
-                  <a:srgbClr val="22282E"/>
-                </a:solidFill>
-              </a:rPr>
-              <a:t>•  No; una técnica puede detectarse por varias Data Sources y una detección puede cubrir varias técnicas. Por eso el mapeo es many-to-many.</a:t>
-            </a:r>
-          </a:p>
-          <a:p>
-            <a:pPr>
-              <a:spcAft>
-                <a:spcPts val="600"/>
-              </a:spcAft>
-            </a:pPr>
-            <a:r>
-              <a:rPr sz="1500">
-                <a:solidFill>
-                  <a:srgbClr val="22282E"/>
-                </a:solidFill>
-              </a:rPr>
-              <a:t>•  ❓ ¿Qué diferencia hay con la Cyber Kill Chain?</a:t>
-            </a:r>
-          </a:p>
-          <a:p>
-            <a:pPr>
-              <a:spcAft>
-                <a:spcPts val="600"/>
-              </a:spcAft>
-            </a:pPr>
-            <a:r>
-              <a:rPr sz="1500">
-                <a:solidFill>
-                  <a:srgbClr val="22282E"/>
-                </a:solidFill>
-              </a:rPr>
-              <a:t>•  La Kill Chain (Lockheed Martin) es lineal y de alto nivel; ATT&amp;CK es un catálogo detallado y no secuencial de comportamientos observados.</a:t>
+              <a:t>•  Construye un ATT&amp;CK Navigator layer que represente el plan de emulación de un grupo real (elige entre APT29, FIN7 o Wizard Spider), con al menos 15 técnicas mapeadas y un comentario por técnica.</a:t>
+            </a:r>
+          </a:p>
+          <a:p>
+            <a:pPr>
+              <a:spcAft>
+                <a:spcPts val="600"/>
+              </a:spcAft>
+            </a:pPr>
+            <a:r>
+              <a:rPr sz="1500">
+                <a:solidFill>
+                  <a:srgbClr val="22282E"/>
+                </a:solidFill>
+              </a:rPr>
+              <a:t>•  Criterio de aceptación: el JSON importa sin errores en Navigator y cada técnica marcada existe realmente en el perfil del grupo según su página de ATT&amp;CK.</a:t>
             </a:r>
           </a:p>
         </p:txBody>
@@ -3511,7 +3469,7 @@
                   <a:srgbClr val="0B3D2E"/>
                 </a:solidFill>
               </a:rPr>
-              <a:t>🔗 Referencias</a:t>
+              <a:t>⚠️ Errores comunes</a:t>
             </a:r>
           </a:p>
         </p:txBody>
@@ -3549,6 +3507,319 @@
                   <a:srgbClr val="22282E"/>
                 </a:solidFill>
               </a:rPr>
+              <a:t>•  Confundir táctica con técnica — La táctica es el "por qué", la técnica el "cómo"; revisa la jerarquía</a:t>
+            </a:r>
+          </a:p>
+          <a:p>
+            <a:pPr>
+              <a:spcAft>
+                <a:spcPts val="600"/>
+              </a:spcAft>
+            </a:pPr>
+            <a:r>
+              <a:rPr sz="1500">
+                <a:solidFill>
+                  <a:srgbClr val="22282E"/>
+                </a:solidFill>
+              </a:rPr>
+              <a:t>•  ID inválido en Navigator — Usaste un ID deprecado; verifica en attack.mitre.org la versión actual</a:t>
+            </a:r>
+          </a:p>
+          <a:p>
+            <a:pPr>
+              <a:spcAft>
+                <a:spcPts val="600"/>
+              </a:spcAft>
+            </a:pPr>
+            <a:r>
+              <a:rPr sz="1500">
+                <a:solidFill>
+                  <a:srgbClr val="22282E"/>
+                </a:solidFill>
+              </a:rPr>
+              <a:t>•  Layer no importa — JSON mal formado o versión de Navigator distinta; ajusta el campo versions</a:t>
+            </a:r>
+          </a:p>
+          <a:p>
+            <a:pPr>
+              <a:spcAft>
+                <a:spcPts val="600"/>
+              </a:spcAft>
+            </a:pPr>
+            <a:r>
+              <a:rPr sz="1500">
+                <a:solidFill>
+                  <a:srgbClr val="22282E"/>
+                </a:solidFill>
+              </a:rPr>
+              <a:t>•  Técnica sin detección clara — No revisaste Data Sources; abre la técnica y lee la sección Detection</a:t>
+            </a:r>
+          </a:p>
+          <a:p>
+            <a:pPr>
+              <a:spcAft>
+                <a:spcPts val="600"/>
+              </a:spcAft>
+            </a:pPr>
+            <a:r>
+              <a:rPr sz="1500">
+                <a:solidFill>
+                  <a:srgbClr val="22282E"/>
+                </a:solidFill>
+              </a:rPr>
+              <a:t>•  Mezclar matrices — Aplicaste una técnica ICS a Enterprise; confirma la matriz correcta</a:t>
+            </a:r>
+          </a:p>
+        </p:txBody>
+      </p:sp>
+    </p:spTree>
+  </p:cSld>
+  <p:clrMapOvr>
+    <a:masterClrMapping/>
+  </p:clrMapOvr>
+</p:sld>
+</file>
+
+<file path=ppt/slides/slide13.xml><?xml version="1.0" encoding="utf-8"?>
+<p:sld xmlns:a="http://schemas.openxmlformats.org/drawingml/2006/main" xmlns:p="http://schemas.openxmlformats.org/presentationml/2006/main" xmlns:r="http://schemas.openxmlformats.org/officeDocument/2006/relationships">
+  <p:cSld>
+    <p:spTree>
+      <p:nvGrpSpPr>
+        <p:cNvPr id="1" name=""/>
+        <p:cNvGrpSpPr/>
+        <p:nvPr/>
+      </p:nvGrpSpPr>
+      <p:grpSpPr/>
+      <p:sp>
+        <p:nvSpPr>
+          <p:cNvPr id="2" name="TextBox 1"/>
+          <p:cNvSpPr txBox="1"/>
+          <p:nvPr/>
+        </p:nvSpPr>
+        <p:spPr>
+          <a:xfrm>
+            <a:off x="457200" y="320040"/>
+            <a:ext cx="8229600" cy="822960"/>
+          </a:xfrm>
+          <a:prstGeom prst="rect">
+            <a:avLst/>
+          </a:prstGeom>
+          <a:noFill/>
+        </p:spPr>
+        <p:txBody>
+          <a:bodyPr wrap="square">
+            <a:spAutoFit/>
+          </a:bodyPr>
+          <a:lstStyle/>
+          <a:p>
+            <a:r>
+              <a:rPr sz="2600" b="1">
+                <a:solidFill>
+                  <a:srgbClr val="0B3D2E"/>
+                </a:solidFill>
+              </a:rPr>
+              <a:t>❓ Preguntas frecuentes</a:t>
+            </a:r>
+          </a:p>
+        </p:txBody>
+      </p:sp>
+      <p:sp>
+        <p:nvSpPr>
+          <p:cNvPr id="3" name="TextBox 2"/>
+          <p:cNvSpPr txBox="1"/>
+          <p:nvPr/>
+        </p:nvSpPr>
+        <p:spPr>
+          <a:xfrm>
+            <a:off x="457200" y="1280160"/>
+            <a:ext cx="8229600" cy="4937760"/>
+          </a:xfrm>
+          <a:prstGeom prst="rect">
+            <a:avLst/>
+          </a:prstGeom>
+          <a:noFill/>
+        </p:spPr>
+        <p:txBody>
+          <a:bodyPr wrap="square">
+            <a:spAutoFit/>
+          </a:bodyPr>
+          <a:lstStyle/>
+          <a:p>
+            <a:pPr>
+              <a:spcAft>
+                <a:spcPts val="600"/>
+              </a:spcAft>
+            </a:pPr>
+            <a:r>
+              <a:rPr sz="1500">
+                <a:solidFill>
+                  <a:srgbClr val="22282E"/>
+                </a:solidFill>
+              </a:rPr>
+              <a:t>•  ❓ ¿ATT&amp;CK es solo para defensores?</a:t>
+            </a:r>
+          </a:p>
+          <a:p>
+            <a:pPr>
+              <a:spcAft>
+                <a:spcPts val="600"/>
+              </a:spcAft>
+            </a:pPr>
+            <a:r>
+              <a:rPr sz="1500">
+                <a:solidFill>
+                  <a:srgbClr val="22282E"/>
+                </a:solidFill>
+              </a:rPr>
+              <a:t>•  No. Para el Red Team es el mapa de planificación y el idioma del informe: mapear tus TTPs permite que la defensa mida su cobertura.</a:t>
+            </a:r>
+          </a:p>
+          <a:p>
+            <a:pPr>
+              <a:spcAft>
+                <a:spcPts val="600"/>
+              </a:spcAft>
+            </a:pPr>
+            <a:r>
+              <a:rPr sz="1500">
+                <a:solidFill>
+                  <a:srgbClr val="22282E"/>
+                </a:solidFill>
+              </a:rPr>
+              <a:t>•  ❓ ¿Cada técnica tiene una única detección?</a:t>
+            </a:r>
+          </a:p>
+          <a:p>
+            <a:pPr>
+              <a:spcAft>
+                <a:spcPts val="600"/>
+              </a:spcAft>
+            </a:pPr>
+            <a:r>
+              <a:rPr sz="1500">
+                <a:solidFill>
+                  <a:srgbClr val="22282E"/>
+                </a:solidFill>
+              </a:rPr>
+              <a:t>•  No; una técnica puede detectarse por varias Data Sources y una detección puede cubrir varias técnicas. Por eso el mapeo es many-to-many.</a:t>
+            </a:r>
+          </a:p>
+          <a:p>
+            <a:pPr>
+              <a:spcAft>
+                <a:spcPts val="600"/>
+              </a:spcAft>
+            </a:pPr>
+            <a:r>
+              <a:rPr sz="1500">
+                <a:solidFill>
+                  <a:srgbClr val="22282E"/>
+                </a:solidFill>
+              </a:rPr>
+              <a:t>•  ❓ ¿Qué diferencia hay con la Cyber Kill Chain?</a:t>
+            </a:r>
+          </a:p>
+          <a:p>
+            <a:pPr>
+              <a:spcAft>
+                <a:spcPts val="600"/>
+              </a:spcAft>
+            </a:pPr>
+            <a:r>
+              <a:rPr sz="1500">
+                <a:solidFill>
+                  <a:srgbClr val="22282E"/>
+                </a:solidFill>
+              </a:rPr>
+              <a:t>•  La Kill Chain (Lockheed Martin) es lineal y de alto nivel; ATT&amp;CK es un catálogo detallado y no secuencial de comportamientos observados.</a:t>
+            </a:r>
+          </a:p>
+        </p:txBody>
+      </p:sp>
+    </p:spTree>
+  </p:cSld>
+  <p:clrMapOvr>
+    <a:masterClrMapping/>
+  </p:clrMapOvr>
+</p:sld>
+</file>
+
+<file path=ppt/slides/slide14.xml><?xml version="1.0" encoding="utf-8"?>
+<p:sld xmlns:a="http://schemas.openxmlformats.org/drawingml/2006/main" xmlns:p="http://schemas.openxmlformats.org/presentationml/2006/main" xmlns:r="http://schemas.openxmlformats.org/officeDocument/2006/relationships">
+  <p:cSld>
+    <p:spTree>
+      <p:nvGrpSpPr>
+        <p:cNvPr id="1" name=""/>
+        <p:cNvGrpSpPr/>
+        <p:nvPr/>
+      </p:nvGrpSpPr>
+      <p:grpSpPr/>
+      <p:sp>
+        <p:nvSpPr>
+          <p:cNvPr id="2" name="TextBox 1"/>
+          <p:cNvSpPr txBox="1"/>
+          <p:nvPr/>
+        </p:nvSpPr>
+        <p:spPr>
+          <a:xfrm>
+            <a:off x="457200" y="320040"/>
+            <a:ext cx="8229600" cy="822960"/>
+          </a:xfrm>
+          <a:prstGeom prst="rect">
+            <a:avLst/>
+          </a:prstGeom>
+          <a:noFill/>
+        </p:spPr>
+        <p:txBody>
+          <a:bodyPr wrap="square">
+            <a:spAutoFit/>
+          </a:bodyPr>
+          <a:lstStyle/>
+          <a:p>
+            <a:r>
+              <a:rPr sz="2600" b="1">
+                <a:solidFill>
+                  <a:srgbClr val="0B3D2E"/>
+                </a:solidFill>
+              </a:rPr>
+              <a:t>🔗 Referencias</a:t>
+            </a:r>
+          </a:p>
+        </p:txBody>
+      </p:sp>
+      <p:sp>
+        <p:nvSpPr>
+          <p:cNvPr id="3" name="TextBox 2"/>
+          <p:cNvSpPr txBox="1"/>
+          <p:nvPr/>
+        </p:nvSpPr>
+        <p:spPr>
+          <a:xfrm>
+            <a:off x="457200" y="1280160"/>
+            <a:ext cx="8229600" cy="4937760"/>
+          </a:xfrm>
+          <a:prstGeom prst="rect">
+            <a:avLst/>
+          </a:prstGeom>
+          <a:noFill/>
+        </p:spPr>
+        <p:txBody>
+          <a:bodyPr wrap="square">
+            <a:spAutoFit/>
+          </a:bodyPr>
+          <a:lstStyle/>
+          <a:p>
+            <a:pPr>
+              <a:spcAft>
+                <a:spcPts val="600"/>
+              </a:spcAft>
+            </a:pPr>
+            <a:r>
+              <a:rPr sz="1500">
+                <a:solidFill>
+                  <a:srgbClr val="22282E"/>
+                </a:solidFill>
+              </a:rPr>
               <a:t>•  MITRE ATT&amp;CK. &lt;https://attack.mitre.org/&gt;</a:t>
             </a:r>
           </a:p>
@@ -3599,6 +3870,81 @@
           </a:p>
         </p:txBody>
       </p:sp>
+    </p:spTree>
+  </p:cSld>
+  <p:clrMapOvr>
+    <a:masterClrMapping/>
+  </p:clrMapOvr>
+</p:sld>
+</file>
+
+<file path=ppt/slides/slide15.xml><?xml version="1.0" encoding="utf-8"?>
+<p:sld xmlns:a="http://schemas.openxmlformats.org/drawingml/2006/main" xmlns:p="http://schemas.openxmlformats.org/presentationml/2006/main" xmlns:r="http://schemas.openxmlformats.org/officeDocument/2006/relationships">
+  <p:cSld>
+    <p:spTree>
+      <p:nvGrpSpPr>
+        <p:cNvPr id="1" name=""/>
+        <p:cNvGrpSpPr/>
+        <p:nvPr/>
+      </p:nvGrpSpPr>
+      <p:grpSpPr/>
+      <p:sp>
+        <p:nvSpPr>
+          <p:cNvPr id="2" name="TextBox 1"/>
+          <p:cNvSpPr txBox="1"/>
+          <p:nvPr/>
+        </p:nvSpPr>
+        <p:spPr>
+          <a:xfrm>
+            <a:off x="457200" y="274320"/>
+            <a:ext cx="8229600" cy="640080"/>
+          </a:xfrm>
+          <a:prstGeom prst="rect">
+            <a:avLst/>
+          </a:prstGeom>
+          <a:noFill/>
+        </p:spPr>
+        <p:txBody>
+          <a:bodyPr wrap="square">
+            <a:spAutoFit/>
+          </a:bodyPr>
+          <a:lstStyle/>
+          <a:p>
+            <a:r>
+              <a:rPr sz="2200" b="1">
+                <a:solidFill>
+                  <a:srgbClr val="0B3D2E"/>
+                </a:solidFill>
+              </a:rPr>
+              <a:t>Diagrama de la clase</a:t>
+            </a:r>
+          </a:p>
+        </p:txBody>
+      </p:sp>
+      <p:pic>
+        <p:nvPicPr>
+          <p:cNvPr id="3" name="Picture 2" descr="a3e2ecbb0be259d3.png"/>
+          <p:cNvPicPr>
+            <a:picLocks noChangeAspect="1"/>
+          </p:cNvPicPr>
+          <p:nvPr/>
+        </p:nvPicPr>
+        <p:blipFill>
+          <a:blip r:embed="rId2"/>
+          <a:stretch>
+            <a:fillRect/>
+          </a:stretch>
+        </p:blipFill>
+        <p:spPr>
+          <a:xfrm>
+            <a:off x="3535481" y="1097280"/>
+            <a:ext cx="2073037" cy="5303520"/>
+          </a:xfrm>
+          <a:prstGeom prst="rect">
+            <a:avLst/>
+          </a:prstGeom>
+        </p:spPr>
+      </p:pic>
     </p:spTree>
   </p:cSld>
   <p:clrMapOvr>
@@ -3683,7 +4029,7 @@
                   <a:srgbClr val="22282E"/>
                 </a:solidFill>
               </a:rPr>
-              <a:t>•  Dominar MITRE ATT&amp;CK como el vocabulario común entre atacantes y defensores. El alumno aprenderá la estructura del framework (tácticas, técnicas, subtécnicas, procedimientos), a mapear acciones ofensivas a IDs concretos y a usar ATT&amp;CK Navigator para planificar cobertura y comunicar resultados de forma que el Blue Team pueda accionarlos.</a:t>
+              <a:t>•  Dominar MITRE ATT&amp;CK como el vocabulario común entre atacantes y defensores. El alumno aprenderá la estructura del framework (tácticas, técnicas, subtécnicas, procedimientos), a mapear acciones…</a:t>
             </a:r>
           </a:p>
         </p:txBody>
@@ -4077,7 +4423,7 @@
                   <a:srgbClr val="0B3D2E"/>
                 </a:solidFill>
               </a:rPr>
-              <a:t>📖 Definiciones y características</a:t>
+              <a:t>🧠 Explicación en profundidad</a:t>
             </a:r>
           </a:p>
         </p:txBody>
@@ -4115,82 +4461,97 @@
                   <a:srgbClr val="22282E"/>
                 </a:solidFill>
               </a:rPr>
-              <a:t>•  Táctica: objetivo táctico del adversario (Initial Access, Execution, Persistence...). Característica: responde al "por qué".</a:t>
-            </a:r>
-          </a:p>
-          <a:p>
-            <a:pPr>
-              <a:spcAft>
-                <a:spcPts val="600"/>
-              </a:spcAft>
-            </a:pPr>
-            <a:r>
-              <a:rPr sz="1500">
-                <a:solidFill>
-                  <a:srgbClr val="22282E"/>
-                </a:solidFill>
-              </a:rPr>
-              <a:t>•  Técnica: método para lograr una táctica (ej. T1059 Command and Scripting Interpreter). Característica: responde al "cómo".</a:t>
-            </a:r>
-          </a:p>
-          <a:p>
-            <a:pPr>
-              <a:spcAft>
-                <a:spcPts val="600"/>
-              </a:spcAft>
-            </a:pPr>
-            <a:r>
-              <a:rPr sz="1500">
-                <a:solidFill>
-                  <a:srgbClr val="22282E"/>
-                </a:solidFill>
-              </a:rPr>
-              <a:t>•  Subtécnica: variante específica (ej. T1059.001 PowerShell). Característica: granularidad para detección.</a:t>
-            </a:r>
-          </a:p>
-          <a:p>
-            <a:pPr>
-              <a:spcAft>
-                <a:spcPts val="600"/>
-              </a:spcAft>
-            </a:pPr>
-            <a:r>
-              <a:rPr sz="1500">
-                <a:solidFill>
-                  <a:srgbClr val="22282E"/>
-                </a:solidFill>
-              </a:rPr>
-              <a:t>•  Procedimiento: implementación concreta observada in-the-wild. Característica: es lo más cercano a IOC/comportamiento real.</a:t>
-            </a:r>
-          </a:p>
-          <a:p>
-            <a:pPr>
-              <a:spcAft>
-                <a:spcPts val="600"/>
-              </a:spcAft>
-            </a:pPr>
-            <a:r>
-              <a:rPr sz="1500">
-                <a:solidFill>
-                  <a:srgbClr val="22282E"/>
-                </a:solidFill>
-              </a:rPr>
-              <a:t>•  Grupo (Gxxxx): actor de amenaza catalogado (ej. G0016 APT29). Característica: agrupa técnicas atribuidas.</a:t>
-            </a:r>
-          </a:p>
-          <a:p>
-            <a:pPr>
-              <a:spcAft>
-                <a:spcPts val="600"/>
-              </a:spcAft>
-            </a:pPr>
-            <a:r>
-              <a:rPr sz="1500">
-                <a:solidFill>
-                  <a:srgbClr val="22282E"/>
-                </a:solidFill>
-              </a:rPr>
-              <a:t>•  Data Source: telemetría que permite observar una técnica (Process, Command, Network Traffic...). Característica: puente hacia el SIEM.</a:t>
+              <a:t>•  ATT&amp;CK no es "una lista de ataques": es un vocabulario compartido entre quien ataca y quien defiende. Antes de ATT&amp;CK, un informe decía "el atacante usó técnicas avanzadas de persistencia" y cada…</a:t>
+            </a:r>
+          </a:p>
+          <a:p>
+            <a:pPr>
+              <a:spcAft>
+                <a:spcPts val="600"/>
+              </a:spcAft>
+            </a:pPr>
+            <a:r>
+              <a:rPr sz="1500">
+                <a:solidFill>
+                  <a:srgbClr val="22282E"/>
+                </a:solidFill>
+              </a:rPr>
+              <a:t>•  El framework se organiza en cuatro niveles que van de lo abstracto a lo concreto:</a:t>
+            </a:r>
+          </a:p>
+          <a:p>
+            <a:pPr>
+              <a:spcAft>
+                <a:spcPts val="600"/>
+              </a:spcAft>
+            </a:pPr>
+            <a:r>
+              <a:rPr sz="1500">
+                <a:solidFill>
+                  <a:srgbClr val="22282E"/>
+                </a:solidFill>
+              </a:rPr>
+              <a:t>•  Nivel — Responde a</a:t>
+            </a:r>
+          </a:p>
+          <a:p>
+            <a:pPr>
+              <a:spcAft>
+                <a:spcPts val="600"/>
+              </a:spcAft>
+            </a:pPr>
+            <a:r>
+              <a:rPr sz="1500">
+                <a:solidFill>
+                  <a:srgbClr val="22282E"/>
+                </a:solidFill>
+              </a:rPr>
+              <a:t>•  Táctica — El por qué (la meta)</a:t>
+            </a:r>
+          </a:p>
+          <a:p>
+            <a:pPr>
+              <a:spcAft>
+                <a:spcPts val="600"/>
+              </a:spcAft>
+            </a:pPr>
+            <a:r>
+              <a:rPr sz="1500">
+                <a:solidFill>
+                  <a:srgbClr val="22282E"/>
+                </a:solidFill>
+              </a:rPr>
+              <a:t>•  Técnica — El cómo general</a:t>
+            </a:r>
+          </a:p>
+          <a:p>
+            <a:pPr>
+              <a:spcAft>
+                <a:spcPts val="600"/>
+              </a:spcAft>
+            </a:pPr>
+            <a:r>
+              <a:rPr sz="1500">
+                <a:solidFill>
+                  <a:srgbClr val="22282E"/>
+                </a:solidFill>
+              </a:rPr>
+              <a:t>•  Subtécnica — El cómo específico</a:t>
+            </a:r>
+          </a:p>
+          <a:p>
+            <a:pPr>
+              <a:spcAft>
+                <a:spcPts val="600"/>
+              </a:spcAft>
+            </a:pPr>
+            <a:r>
+              <a:rPr sz="1500">
+                <a:solidFill>
+                  <a:srgbClr val="22282E"/>
+                </a:solidFill>
+              </a:rPr>
+              <a:t>•  Procedimiento — La implementación real observada</a:t>
             </a:r>
           </a:p>
         </p:txBody>
@@ -4241,7 +4602,7 @@
                   <a:srgbClr val="0B3D2E"/>
                 </a:solidFill>
               </a:rPr>
-              <a:t>🧰 Herramientas y preparación</a:t>
+              <a:t>📖 Definiciones y características</a:t>
             </a:r>
           </a:p>
         </p:txBody>
@@ -4279,82 +4640,82 @@
                   <a:srgbClr val="22282E"/>
                 </a:solidFill>
               </a:rPr>
-              <a:t>•  Navegador web para attack.mitre.org y el ATT&amp;CK Navigator (también desplegable en local vía Docker).</a:t>
-            </a:r>
-          </a:p>
-          <a:p>
-            <a:pPr>
-              <a:spcAft>
-                <a:spcPts val="600"/>
-              </a:spcAft>
-            </a:pPr>
-            <a:r>
-              <a:rPr sz="1500">
-                <a:solidFill>
-                  <a:srgbClr val="22282E"/>
-                </a:solidFill>
-              </a:rPr>
-              <a:t>•  pip install mitreattack-python para consultar el conocimiento por API (STIX/TAXII).</a:t>
-            </a:r>
-          </a:p>
-          <a:p>
-            <a:pPr>
-              <a:spcAft>
-                <a:spcPts val="600"/>
-              </a:spcAft>
-            </a:pPr>
-            <a:r>
-              <a:rPr sz="1500">
-                <a:solidFill>
-                  <a:srgbClr val="22282E"/>
-                </a:solidFill>
-              </a:rPr>
-              <a:t>•  Opcional: desplegar Navigator local:</a:t>
-            </a:r>
-          </a:p>
-          <a:p>
-            <a:pPr>
-              <a:spcAft>
-                <a:spcPts val="600"/>
-              </a:spcAft>
-            </a:pPr>
-            <a:r>
-              <a:rPr sz="1500">
-                <a:solidFill>
-                  <a:srgbClr val="22282E"/>
-                </a:solidFill>
-              </a:rPr>
-              <a:t>•  git clone https://github.com/mitre-attack/attack-navigator</a:t>
-            </a:r>
-          </a:p>
-          <a:p>
-            <a:pPr>
-              <a:spcAft>
-                <a:spcPts val="600"/>
-              </a:spcAft>
-            </a:pPr>
-            <a:r>
-              <a:rPr sz="1500">
-                <a:solidFill>
-                  <a:srgbClr val="22282E"/>
-                </a:solidFill>
-              </a:rPr>
-              <a:t>•  cd attack-navigator/nav-app &amp;&amp; npm install &amp;&amp; npm start</a:t>
-            </a:r>
-          </a:p>
-          <a:p>
-            <a:pPr>
-              <a:spcAft>
-                <a:spcPts val="600"/>
-              </a:spcAft>
-            </a:pPr>
-            <a:r>
-              <a:rPr sz="1500">
-                <a:solidFill>
-                  <a:srgbClr val="22282E"/>
-                </a:solidFill>
-              </a:rPr>
-              <a:t>•  El JSON de la matriz Enterprise (enterprise-attack.json) del repo mitre/cti.</a:t>
+              <a:t>•  Táctica: objetivo táctico del adversario (Initial Access, Execution, Persistence...). Característica: responde al "por qué".</a:t>
+            </a:r>
+          </a:p>
+          <a:p>
+            <a:pPr>
+              <a:spcAft>
+                <a:spcPts val="600"/>
+              </a:spcAft>
+            </a:pPr>
+            <a:r>
+              <a:rPr sz="1500">
+                <a:solidFill>
+                  <a:srgbClr val="22282E"/>
+                </a:solidFill>
+              </a:rPr>
+              <a:t>•  Técnica: método para lograr una táctica (ej. T1059 Command and Scripting Interpreter). Característica: responde al "cómo".</a:t>
+            </a:r>
+          </a:p>
+          <a:p>
+            <a:pPr>
+              <a:spcAft>
+                <a:spcPts val="600"/>
+              </a:spcAft>
+            </a:pPr>
+            <a:r>
+              <a:rPr sz="1500">
+                <a:solidFill>
+                  <a:srgbClr val="22282E"/>
+                </a:solidFill>
+              </a:rPr>
+              <a:t>•  Subtécnica: variante específica (ej. T1059.001 PowerShell). Característica: granularidad para detección.</a:t>
+            </a:r>
+          </a:p>
+          <a:p>
+            <a:pPr>
+              <a:spcAft>
+                <a:spcPts val="600"/>
+              </a:spcAft>
+            </a:pPr>
+            <a:r>
+              <a:rPr sz="1500">
+                <a:solidFill>
+                  <a:srgbClr val="22282E"/>
+                </a:solidFill>
+              </a:rPr>
+              <a:t>•  Procedimiento: implementación concreta observada in-the-wild. Característica: es lo más cercano a IOC/comportamiento real.</a:t>
+            </a:r>
+          </a:p>
+          <a:p>
+            <a:pPr>
+              <a:spcAft>
+                <a:spcPts val="600"/>
+              </a:spcAft>
+            </a:pPr>
+            <a:r>
+              <a:rPr sz="1500">
+                <a:solidFill>
+                  <a:srgbClr val="22282E"/>
+                </a:solidFill>
+              </a:rPr>
+              <a:t>•  Grupo (Gxxxx): actor de amenaza catalogado (ej. G0016 APT29). Característica: agrupa técnicas atribuidas.</a:t>
+            </a:r>
+          </a:p>
+          <a:p>
+            <a:pPr>
+              <a:spcAft>
+                <a:spcPts val="600"/>
+              </a:spcAft>
+            </a:pPr>
+            <a:r>
+              <a:rPr sz="1500">
+                <a:solidFill>
+                  <a:srgbClr val="22282E"/>
+                </a:solidFill>
+              </a:rPr>
+              <a:t>•  Data Source: telemetría que permite observar una técnica (Process, Command, Network Traffic...). Característica: puente hacia el SIEM.</a:t>
             </a:r>
           </a:p>
         </p:txBody>
@@ -4405,7 +4766,7 @@
                   <a:srgbClr val="0B3D2E"/>
                 </a:solidFill>
               </a:rPr>
-              <a:t>🧪 Laboratorio guiado</a:t>
+              <a:t>📔 Glosario</a:t>
             </a:r>
           </a:p>
         </p:txBody>
@@ -4443,97 +4804,97 @@
                   <a:srgbClr val="22282E"/>
                 </a:solidFill>
               </a:rPr>
-              <a:t>•  Explora la matriz Enterprise. En attack.mitre.org localiza las 14 tácticas y cuenta cuántas técnicas cuelgan de Credential Access.</a:t>
-            </a:r>
-          </a:p>
-          <a:p>
-            <a:pPr>
-              <a:spcAft>
-                <a:spcPts val="600"/>
-              </a:spcAft>
-            </a:pPr>
-            <a:r>
-              <a:rPr sz="1500">
-                <a:solidFill>
-                  <a:srgbClr val="22282E"/>
-                </a:solidFill>
-              </a:rPr>
-              <a:t>•  Mapea una acción. Toma "un atacante ejecuta un script de PowerShell descargado" y asígnale la táctica (Execution) y la técnica/subtécnica (T1059.001).</a:t>
-            </a:r>
-          </a:p>
-          <a:p>
-            <a:pPr>
-              <a:spcAft>
-                <a:spcPts val="600"/>
-              </a:spcAft>
-            </a:pPr>
-            <a:r>
-              <a:rPr sz="1500">
-                <a:solidFill>
-                  <a:srgbClr val="22282E"/>
-                </a:solidFill>
-              </a:rPr>
-              <a:t>•  Ficha un grupo. Abre G0016 (APT29) y anota 5 técnicas que usa; observa el software asociado (ej. S0154 Cobalt Strike).</a:t>
-            </a:r>
-          </a:p>
-          <a:p>
-            <a:pPr>
-              <a:spcAft>
-                <a:spcPts val="600"/>
-              </a:spcAft>
-            </a:pPr>
-            <a:r>
-              <a:rPr sz="1500">
-                <a:solidFill>
-                  <a:srgbClr val="22282E"/>
-                </a:solidFill>
-              </a:rPr>
-              <a:t>•  Instala la API: pip install mitreattack-python y lista técnicas de una táctica:</a:t>
-            </a:r>
-          </a:p>
-          <a:p>
-            <a:pPr>
-              <a:spcAft>
-                <a:spcPts val="600"/>
-              </a:spcAft>
-            </a:pPr>
-            <a:r>
-              <a:rPr sz="1500">
-                <a:solidFill>
-                  <a:srgbClr val="22282E"/>
-                </a:solidFill>
-              </a:rPr>
-              <a:t>•  from mitreattack.stix20 import MitreAttackData</a:t>
-            </a:r>
-          </a:p>
-          <a:p>
-            <a:pPr>
-              <a:spcAft>
-                <a:spcPts val="600"/>
-              </a:spcAft>
-            </a:pPr>
-            <a:r>
-              <a:rPr sz="1500">
-                <a:solidFill>
-                  <a:srgbClr val="22282E"/>
-                </a:solidFill>
-              </a:rPr>
-              <a:t>•  data = MitreAttackData("enterprise-attack.json")</a:t>
-            </a:r>
-          </a:p>
-          <a:p>
-            <a:pPr>
-              <a:spcAft>
-                <a:spcPts val="600"/>
-              </a:spcAft>
-            </a:pPr>
-            <a:r>
-              <a:rPr sz="1500">
-                <a:solidFill>
-                  <a:srgbClr val="22282E"/>
-                </a:solidFill>
-              </a:rPr>
-              <a:t>•  for t in data.gettechniquesbytactic("credential-access", "enterprise-attack"):</a:t>
+              <a:t>•  Término — Definición concisa</a:t>
+            </a:r>
+          </a:p>
+          <a:p>
+            <a:pPr>
+              <a:spcAft>
+                <a:spcPts val="600"/>
+              </a:spcAft>
+            </a:pPr>
+            <a:r>
+              <a:rPr sz="1500">
+                <a:solidFill>
+                  <a:srgbClr val="22282E"/>
+                </a:solidFill>
+              </a:rPr>
+              <a:t>•  ATT&amp;CK — Base de conocimiento de tácticas y técnicas adversarias observadas</a:t>
+            </a:r>
+          </a:p>
+          <a:p>
+            <a:pPr>
+              <a:spcAft>
+                <a:spcPts val="600"/>
+              </a:spcAft>
+            </a:pPr>
+            <a:r>
+              <a:rPr sz="1500">
+                <a:solidFill>
+                  <a:srgbClr val="22282E"/>
+                </a:solidFill>
+              </a:rPr>
+              <a:t>•  Táctica — Objetivo del adversario; el "por qué" (14 en Enterprise)</a:t>
+            </a:r>
+          </a:p>
+          <a:p>
+            <a:pPr>
+              <a:spcAft>
+                <a:spcPts val="600"/>
+              </a:spcAft>
+            </a:pPr>
+            <a:r>
+              <a:rPr sz="1500">
+                <a:solidFill>
+                  <a:srgbClr val="22282E"/>
+                </a:solidFill>
+              </a:rPr>
+              <a:t>•  Técnica — Método para lograr una táctica; el "cómo" general (Txxxx)</a:t>
+            </a:r>
+          </a:p>
+          <a:p>
+            <a:pPr>
+              <a:spcAft>
+                <a:spcPts val="600"/>
+              </a:spcAft>
+            </a:pPr>
+            <a:r>
+              <a:rPr sz="1500">
+                <a:solidFill>
+                  <a:srgbClr val="22282E"/>
+                </a:solidFill>
+              </a:rPr>
+              <a:t>•  Subtécnica — Variante específica de una técnica (Txxxx.00x)</a:t>
+            </a:r>
+          </a:p>
+          <a:p>
+            <a:pPr>
+              <a:spcAft>
+                <a:spcPts val="600"/>
+              </a:spcAft>
+            </a:pPr>
+            <a:r>
+              <a:rPr sz="1500">
+                <a:solidFill>
+                  <a:srgbClr val="22282E"/>
+                </a:solidFill>
+              </a:rPr>
+              <a:t>•  Procedimiento — Implementación concreta de una técnica por un actor real</a:t>
+            </a:r>
+          </a:p>
+          <a:p>
+            <a:pPr>
+              <a:spcAft>
+                <a:spcPts val="600"/>
+              </a:spcAft>
+            </a:pPr>
+            <a:r>
+              <a:rPr sz="1500">
+                <a:solidFill>
+                  <a:srgbClr val="22282E"/>
+                </a:solidFill>
+              </a:rPr>
+              <a:t>•  Grupo (Gxxxx) — Actor de amenaza catalogado con sus técnicas atribuidas</a:t>
             </a:r>
           </a:p>
         </p:txBody>
@@ -4584,7 +4945,7 @@
                   <a:srgbClr val="0B3D2E"/>
                 </a:solidFill>
               </a:rPr>
-              <a:t>✍️ Ejercicios</a:t>
+              <a:t>🧰 Herramientas y preparación</a:t>
             </a:r>
           </a:p>
         </p:txBody>
@@ -4622,82 +4983,52 @@
                   <a:srgbClr val="22282E"/>
                 </a:solidFill>
               </a:rPr>
-              <a:t>•  Da el ID ATT&amp;CK de: Kerberoasting, Pass-the-Hash, LSASS dumping y phishing con adjunto.</a:t>
-            </a:r>
-          </a:p>
-          <a:p>
-            <a:pPr>
-              <a:spcAft>
-                <a:spcPts val="600"/>
-              </a:spcAft>
-            </a:pPr>
-            <a:r>
-              <a:rPr sz="1500">
-                <a:solidFill>
-                  <a:srgbClr val="22282E"/>
-                </a:solidFill>
-              </a:rPr>
-              <a:t>•  Explica la diferencia entre técnica y procedimiento con un ejemplo de PowerShell.</a:t>
-            </a:r>
-          </a:p>
-          <a:p>
-            <a:pPr>
-              <a:spcAft>
-                <a:spcPts val="600"/>
-              </a:spcAft>
-            </a:pPr>
-            <a:r>
-              <a:rPr sz="1500">
-                <a:solidFill>
-                  <a:srgbClr val="22282E"/>
-                </a:solidFill>
-              </a:rPr>
-              <a:t>•  Crea un layer de Navigator con 10 técnicas y exporta el JSON.</a:t>
-            </a:r>
-          </a:p>
-          <a:p>
-            <a:pPr>
-              <a:spcAft>
-                <a:spcPts val="600"/>
-              </a:spcAft>
-            </a:pPr>
-            <a:r>
-              <a:rPr sz="1500">
-                <a:solidFill>
-                  <a:srgbClr val="22282E"/>
-                </a:solidFill>
-              </a:rPr>
-              <a:t>•  Para 5 técnicas, indica su Data Source principal de detección.</a:t>
-            </a:r>
-          </a:p>
-          <a:p>
-            <a:pPr>
-              <a:spcAft>
-                <a:spcPts val="600"/>
-              </a:spcAft>
-            </a:pPr>
-            <a:r>
-              <a:rPr sz="1500">
-                <a:solidFill>
-                  <a:srgbClr val="22282E"/>
-                </a:solidFill>
-              </a:rPr>
-              <a:t>•  Compara la matriz Enterprise con la de ICS: nombra dos tácticas exclusivas de ICS.</a:t>
-            </a:r>
-          </a:p>
-          <a:p>
-            <a:pPr>
-              <a:spcAft>
-                <a:spcPts val="600"/>
-              </a:spcAft>
-            </a:pPr>
-            <a:r>
-              <a:rPr sz="1500">
-                <a:solidFill>
-                  <a:srgbClr val="22282E"/>
-                </a:solidFill>
-              </a:rPr>
-              <a:t>•  Usa la API para contar cuántas subtécnicas tiene T1059.</a:t>
+              <a:t>•  Navegador web para attack.mitre.org y el ATT&amp;CK Navigator (también desplegable en local vía Docker).</a:t>
+            </a:r>
+          </a:p>
+          <a:p>
+            <a:pPr>
+              <a:spcAft>
+                <a:spcPts val="600"/>
+              </a:spcAft>
+            </a:pPr>
+            <a:r>
+              <a:rPr sz="1500">
+                <a:solidFill>
+                  <a:srgbClr val="22282E"/>
+                </a:solidFill>
+              </a:rPr>
+              <a:t>•  pip install mitreattack-python para consultar el conocimiento por API (STIX/TAXII).</a:t>
+            </a:r>
+          </a:p>
+          <a:p>
+            <a:pPr>
+              <a:spcAft>
+                <a:spcPts val="600"/>
+              </a:spcAft>
+            </a:pPr>
+            <a:r>
+              <a:rPr sz="1500">
+                <a:solidFill>
+                  <a:srgbClr val="22282E"/>
+                </a:solidFill>
+              </a:rPr>
+              <a:t>•  Opcional: desplegar Navigator local:</a:t>
+            </a:r>
+          </a:p>
+          <a:p>
+            <a:pPr>
+              <a:spcAft>
+                <a:spcPts val="600"/>
+              </a:spcAft>
+            </a:pPr>
+            <a:r>
+              <a:rPr sz="1500">
+                <a:solidFill>
+                  <a:srgbClr val="22282E"/>
+                </a:solidFill>
+              </a:rPr>
+              <a:t>•  El JSON de la matriz Enterprise (enterprise-attack.json) del repo mitre/cti.</a:t>
             </a:r>
           </a:p>
         </p:txBody>
@@ -4748,7 +5079,7 @@
                   <a:srgbClr val="0B3D2E"/>
                 </a:solidFill>
               </a:rPr>
-              <a:t>📝 Reto verificable</a:t>
+              <a:t>🧪 Laboratorio guiado</a:t>
             </a:r>
           </a:p>
         </p:txBody>
@@ -4786,22 +5117,97 @@
                   <a:srgbClr val="22282E"/>
                 </a:solidFill>
               </a:rPr>
-              <a:t>•  Construye un ATT&amp;CK Navigator layer que represente el plan de emulación de un grupo real (elige entre APT29, FIN7 o Wizard Spider), con al menos 15 técnicas mapeadas y un comentario por técnica.</a:t>
-            </a:r>
-          </a:p>
-          <a:p>
-            <a:pPr>
-              <a:spcAft>
-                <a:spcPts val="600"/>
-              </a:spcAft>
-            </a:pPr>
-            <a:r>
-              <a:rPr sz="1500">
-                <a:solidFill>
-                  <a:srgbClr val="22282E"/>
-                </a:solidFill>
-              </a:rPr>
-              <a:t>•  Criterio de aceptación: el JSON importa sin errores en Navigator y cada técnica marcada existe realmente en el perfil del grupo según su página de ATT&amp;CK.</a:t>
+              <a:t>•  Explora la matriz Enterprise. En attack.mitre.org localiza las 14 tácticas y cuenta cuántas técnicas cuelgan de Credential Access.</a:t>
+            </a:r>
+          </a:p>
+          <a:p>
+            <a:pPr>
+              <a:spcAft>
+                <a:spcPts val="600"/>
+              </a:spcAft>
+            </a:pPr>
+            <a:r>
+              <a:rPr sz="1500">
+                <a:solidFill>
+                  <a:srgbClr val="22282E"/>
+                </a:solidFill>
+              </a:rPr>
+              <a:t>•  Mapea una acción. Toma "un atacante ejecuta un script de PowerShell descargado" y asígnale la táctica (Execution) y la técnica/subtécnica (T1059.001).</a:t>
+            </a:r>
+          </a:p>
+          <a:p>
+            <a:pPr>
+              <a:spcAft>
+                <a:spcPts val="600"/>
+              </a:spcAft>
+            </a:pPr>
+            <a:r>
+              <a:rPr sz="1500">
+                <a:solidFill>
+                  <a:srgbClr val="22282E"/>
+                </a:solidFill>
+              </a:rPr>
+              <a:t>•  Ficha un grupo. Abre G0016 (APT29) y anota 5 técnicas que usa; observa el software asociado (ej. S0154 Cobalt Strike).</a:t>
+            </a:r>
+          </a:p>
+          <a:p>
+            <a:pPr>
+              <a:spcAft>
+                <a:spcPts val="600"/>
+              </a:spcAft>
+            </a:pPr>
+            <a:r>
+              <a:rPr sz="1500">
+                <a:solidFill>
+                  <a:srgbClr val="22282E"/>
+                </a:solidFill>
+              </a:rPr>
+              <a:t>•  Instala la API: pip install mitreattack-python y lista técnicas de una táctica:</a:t>
+            </a:r>
+          </a:p>
+          <a:p>
+            <a:pPr>
+              <a:spcAft>
+                <a:spcPts val="600"/>
+              </a:spcAft>
+            </a:pPr>
+            <a:r>
+              <a:rPr sz="1500">
+                <a:solidFill>
+                  <a:srgbClr val="22282E"/>
+                </a:solidFill>
+              </a:rPr>
+              <a:t>•  Crea un layer en Navigator. Añade manualmente las técnicas de APT29 y coloréalas; exporta el JSON.</a:t>
+            </a:r>
+          </a:p>
+          <a:p>
+            <a:pPr>
+              <a:spcAft>
+                <a:spcPts val="600"/>
+              </a:spcAft>
+            </a:pPr>
+            <a:r>
+              <a:rPr sz="1500">
+                <a:solidFill>
+                  <a:srgbClr val="22282E"/>
+                </a:solidFill>
+              </a:rPr>
+              <a:t>•  Cruza con Data Sources. Para tres técnicas del layer, anota qué Data Source las detecta (ej. T1059.001 → Command Execution / Script Block Logging).</a:t>
+            </a:r>
+          </a:p>
+          <a:p>
+            <a:pPr>
+              <a:spcAft>
+                <a:spcPts val="600"/>
+              </a:spcAft>
+            </a:pPr>
+            <a:r>
+              <a:rPr sz="1500">
+                <a:solidFill>
+                  <a:srgbClr val="22282E"/>
+                </a:solidFill>
+              </a:rPr>
+              <a:t>•  Genera una capa de "plan de operación": marca en verde lo que planeas ejecutar en el AD lab de las clases siguientes.</a:t>
             </a:r>
           </a:p>
         </p:txBody>
